--- a/artifacts/speaking-portfolio-expanded/decks/adaptive-systems-30min-screen.pptx
+++ b/artifacts/speaking-portfolio-expanded/decks/adaptive-systems-30min-screen.pptx
@@ -2581,7 +2581,7 @@
                 <a:ea typeface="Arial"/>
                 <a:cs typeface="Arial"/>
               </a:rPr>
-              <a:t xml:space="preserve">And return to the assistant with everything. We never built it. We built a factory for small ones, each with a tailored prompt, a short tool list, a hard budget, and a log of every time it asked for more. That is the strategy I believe in for the next few years: not one agent you have to trust, but many you can afford to check.</a:t>
+              <a:t xml:space="preserve">And return to the assistant with everything. It is still coming; nothing on these slides stops it, and I would not want to. What changed is how many of its pathways are live at once. Each job gets a small agent with a tailored prompt, a short tool list, a hard budget, and a log of every time it asked for more. That is the strategy I believe in for the next few years: not one agent holding every combination, which nobody can check, but many small ones you can afford to.</a:t>
             </a:r>
             <a:endParaRPr lang="en-US" sz="1200"/>
           </a:p>
@@ -3451,53 +3451,53 @@
                 <a:ea typeface="Arial"/>
                 <a:cs typeface="Arial"/>
               </a:rPr>
-              <a:t xml:space="preserve">All customer data</a:t>
-            </a:r>
-            <a:endParaRPr lang="en-US" sz="1200"/>
-          </a:p>
-          <a:p>
-            <a:pPr marL="0" indent="0">
-              <a:lnSpc>
-                <a:spcPts val="1560"/>
-              </a:lnSpc>
-              <a:spcAft>
-                <a:spcPts val="0"/>
-              </a:spcAft>
-              <a:buNone/>
-            </a:pPr>
-            <a:r>
-              <a:rPr lang="en-US" sz="1200" b="0">
-                <a:solidFill>
-                  <a:srgbClr val="202b33"/>
-                </a:solidFill>
-                <a:latin typeface="Arial"/>
-                <a:ea typeface="Arial"/>
-                <a:cs typeface="Arial"/>
-              </a:rPr>
-              <a:t xml:space="preserve"/>
-            </a:r>
-            <a:endParaRPr lang="en-US" sz="1200"/>
-          </a:p>
-          <a:p>
-            <a:pPr marL="0" indent="0">
-              <a:lnSpc>
-                <a:spcPts val="1560"/>
-              </a:lnSpc>
-              <a:spcAft>
-                <a:spcPts val="0"/>
-              </a:spcAft>
-              <a:buNone/>
-            </a:pPr>
-            <a:r>
-              <a:rPr lang="en-US" sz="1200" b="0">
-                <a:solidFill>
-                  <a:srgbClr val="202b33"/>
-                </a:solidFill>
-                <a:latin typeface="Arial"/>
-                <a:ea typeface="Arial"/>
-                <a:cs typeface="Arial"/>
-              </a:rPr>
-              <a:t xml:space="preserve">Tools that email, refund, delete, deploy</a:t>
+              <a:t xml:space="preserve">Browsers, CLIs, every SaaS: an agent layer you opt out of with --no-agent</a:t>
+            </a:r>
+            <a:endParaRPr lang="en-US" sz="1200"/>
+          </a:p>
+          <a:p>
+            <a:pPr marL="0" indent="0">
+              <a:lnSpc>
+                <a:spcPts val="1560"/>
+              </a:lnSpc>
+              <a:spcAft>
+                <a:spcPts val="0"/>
+              </a:spcAft>
+              <a:buNone/>
+            </a:pPr>
+            <a:r>
+              <a:rPr lang="en-US" sz="1200" b="0">
+                <a:solidFill>
+                  <a:srgbClr val="202b33"/>
+                </a:solidFill>
+                <a:latin typeface="Arial"/>
+                <a:ea typeface="Arial"/>
+                <a:cs typeface="Arial"/>
+              </a:rPr>
+              <a:t xml:space="preserve"/>
+            </a:r>
+            <a:endParaRPr lang="en-US" sz="1200"/>
+          </a:p>
+          <a:p>
+            <a:pPr marL="0" indent="0">
+              <a:lnSpc>
+                <a:spcPts val="1560"/>
+              </a:lnSpc>
+              <a:spcAft>
+                <a:spcPts val="0"/>
+              </a:spcAft>
+              <a:buNone/>
+            </a:pPr>
+            <a:r>
+              <a:rPr lang="en-US" sz="1200" b="0">
+                <a:solidFill>
+                  <a:srgbClr val="202b33"/>
+                </a:solidFill>
+                <a:latin typeface="Arial"/>
+                <a:ea typeface="Arial"/>
+                <a:cs typeface="Arial"/>
+              </a:rPr>
+              <a:t xml:space="preserve">Ten tools is forty-five pairs. One more integration is not one more path.</a:t>
             </a:r>
             <a:endParaRPr lang="en-US" sz="1200"/>
           </a:p>
@@ -3589,191 +3589,237 @@
                 <a:ea typeface="Arial"/>
                 <a:cs typeface="Arial"/>
               </a:rPr>
-              <a:t xml:space="preserve">Zoom out from the ingest job. The thing we are all building toward is an assistant with access to every customer's data and a toolbox that can send email, issue refunds, delete records and ship code. Most of the damage it will ever do will be an accident: a confident mapping, a helpful cleanup, a tool called with the wrong ID.</a:t>
-            </a:r>
-            <a:endParaRPr lang="en-US" sz="1200"/>
-          </a:p>
-          <a:p>
-            <a:pPr marL="0" indent="0">
-              <a:lnSpc>
-                <a:spcPts val="1560"/>
-              </a:lnSpc>
-              <a:spcAft>
-                <a:spcPts val="0"/>
-              </a:spcAft>
-              <a:buNone/>
-            </a:pPr>
-            <a:r>
-              <a:rPr lang="en-US" sz="1200" b="0">
-                <a:solidFill>
-                  <a:srgbClr val="202b33"/>
-                </a:solidFill>
-                <a:latin typeface="Arial"/>
-                <a:ea typeface="Arial"/>
-                <a:cs typeface="Arial"/>
-              </a:rPr>
-              <a:t xml:space="preserve"/>
-            </a:r>
-            <a:endParaRPr lang="en-US" sz="1200"/>
-          </a:p>
-          <a:p>
-            <a:pPr marL="0" indent="0">
-              <a:lnSpc>
-                <a:spcPts val="1560"/>
-              </a:lnSpc>
-              <a:spcAft>
-                <a:spcPts val="0"/>
-              </a:spcAft>
-              <a:buNone/>
-            </a:pPr>
-            <a:r>
-              <a:rPr lang="en-US" sz="1200" b="0">
-                <a:solidFill>
-                  <a:srgbClr val="202b33"/>
-                </a:solidFill>
-                <a:latin typeface="Arial"/>
-                <a:ea typeface="Arial"/>
-                <a:cs typeface="Arial"/>
-              </a:rPr>
-              <a:t xml:space="preserve">Then there are the people who mean it. That renamed field could carry a sentence aimed at the model. A vendor payload is untrusted input that now gets read by something that can act.</a:t>
-            </a:r>
-            <a:endParaRPr lang="en-US" sz="1200"/>
-          </a:p>
-          <a:p>
-            <a:pPr marL="0" indent="0">
-              <a:lnSpc>
-                <a:spcPts val="1560"/>
-              </a:lnSpc>
-              <a:spcAft>
-                <a:spcPts val="0"/>
-              </a:spcAft>
-              <a:buNone/>
-            </a:pPr>
-            <a:r>
-              <a:rPr lang="en-US" sz="1200" b="0">
-                <a:solidFill>
-                  <a:srgbClr val="202b33"/>
-                </a:solidFill>
-                <a:latin typeface="Arial"/>
-                <a:ea typeface="Arial"/>
-                <a:cs typeface="Arial"/>
-              </a:rPr>
-              <a:t xml:space="preserve"/>
-            </a:r>
-            <a:endParaRPr lang="en-US" sz="1200"/>
-          </a:p>
-          <a:p>
-            <a:pPr marL="0" indent="0">
-              <a:lnSpc>
-                <a:spcPts val="1560"/>
-              </a:lnSpc>
-              <a:spcAft>
-                <a:spcPts val="0"/>
-              </a:spcAft>
-              <a:buNone/>
-            </a:pPr>
-            <a:r>
-              <a:rPr lang="en-US" sz="1200" b="0">
-                <a:solidFill>
-                  <a:srgbClr val="202b33"/>
-                </a:solidFill>
-                <a:latin typeface="Arial"/>
-                <a:ea typeface="Arial"/>
-                <a:cs typeface="Arial"/>
-              </a:rPr>
-              <a:t xml:space="preserve">So the question for the next few years is not whether to give the assistant access. It is which strategies let us give it access and manage the risk. My answer, and what I have been building, is: never build the one assistant that has everything. Conjure a small one for each job, with exactly enough.</a:t>
-            </a:r>
-            <a:endParaRPr lang="en-US" sz="1200"/>
-          </a:p>
-          <a:p>
-            <a:pPr marL="0" indent="0">
-              <a:lnSpc>
-                <a:spcPts val="1560"/>
-              </a:lnSpc>
-              <a:spcAft>
-                <a:spcPts val="0"/>
-              </a:spcAft>
-              <a:buNone/>
-            </a:pPr>
-            <a:r>
-              <a:rPr lang="en-US" sz="1200" b="0">
-                <a:solidFill>
-                  <a:srgbClr val="202b33"/>
-                </a:solidFill>
-                <a:latin typeface="Arial"/>
-                <a:ea typeface="Arial"/>
-                <a:cs typeface="Arial"/>
-              </a:rPr>
-              <a:t xml:space="preserve"/>
-            </a:r>
-            <a:endParaRPr lang="en-US" sz="1200"/>
-          </a:p>
-          <a:p>
-            <a:pPr marL="0" indent="0">
-              <a:lnSpc>
-                <a:spcPts val="1560"/>
-              </a:lnSpc>
-              <a:spcAft>
-                <a:spcPts val="0"/>
-              </a:spcAft>
-              <a:buNone/>
-            </a:pPr>
-            <a:r>
-              <a:rPr lang="en-US" sz="1200" b="0">
-                <a:solidFill>
-                  <a:srgbClr val="202b33"/>
-                </a:solidFill>
-                <a:latin typeface="Arial"/>
-                <a:ea typeface="Arial"/>
-                <a:cs typeface="Arial"/>
-              </a:rPr>
-              <a:t xml:space="preserve">Your own near miss with an over-permissioned agent, or a tool call you were glad had a dry-run flag.</a:t>
-            </a:r>
-            <a:endParaRPr lang="en-US" sz="1200"/>
-          </a:p>
-          <a:p>
-            <a:pPr marL="0" indent="0">
-              <a:lnSpc>
-                <a:spcPts val="1560"/>
-              </a:lnSpc>
-              <a:spcAft>
-                <a:spcPts val="0"/>
-              </a:spcAft>
-              <a:buNone/>
-            </a:pPr>
-            <a:r>
-              <a:rPr lang="en-US" sz="1200" b="0">
-                <a:solidFill>
-                  <a:srgbClr val="202b33"/>
-                </a:solidFill>
-                <a:latin typeface="Arial"/>
-                <a:ea typeface="Arial"/>
-                <a:cs typeface="Arial"/>
-              </a:rPr>
-              <a:t xml:space="preserve"/>
-            </a:r>
-            <a:endParaRPr lang="en-US" sz="1200"/>
-          </a:p>
-          <a:p>
-            <a:pPr marL="0" indent="0">
-              <a:lnSpc>
-                <a:spcPts val="1560"/>
-              </a:lnSpc>
-              <a:spcAft>
-                <a:spcPts val="0"/>
-              </a:spcAft>
-              <a:buNone/>
-            </a:pPr>
-            <a:r>
-              <a:rPr lang="en-US" sz="1200" b="0">
-                <a:solidFill>
-                  <a:srgbClr val="202b33"/>
-                </a:solidFill>
-                <a:latin typeface="Arial"/>
-                <a:ea typeface="Arial"/>
-                <a:cs typeface="Arial"/>
-              </a:rPr>
-              <a:t xml:space="preserve">Pause on the third line. Let the room feel that the accident case is the common one.</a:t>
+              <a:t xml:space="preserve">Zoom out from the ingest job. The assistant with every customer's data and a toolbox that can send email, issue refunds, delete records and ship code is not a design we get to decline. It is arriving one integration at a time, and not only in our products. Browsers now ship a chat that drives the page. WebMCP lets an agent act on whatever site you have open. The next generation of CLIs will take natural language by default, and you will pass `--no-agent` to get the old behavior back. The intermediary intelligence layer is going to wrap everything, and I know who to blame: the kids. Actually, the kids hate AI. It will be their kids who demand an agent safety blanket on everything. I will be in a rocking chair explaining that the internet was better on vinyl.</a:t>
+            </a:r>
+            <a:endParaRPr lang="en-US" sz="1200"/>
+          </a:p>
+          <a:p>
+            <a:pPr marL="0" indent="0">
+              <a:lnSpc>
+                <a:spcPts val="1560"/>
+              </a:lnSpc>
+              <a:spcAft>
+                <a:spcPts val="0"/>
+              </a:spcAft>
+              <a:buNone/>
+            </a:pPr>
+            <a:r>
+              <a:rPr lang="en-US" sz="1200" b="0">
+                <a:solidFill>
+                  <a:srgbClr val="202b33"/>
+                </a:solidFill>
+                <a:latin typeface="Arial"/>
+                <a:ea typeface="Arial"/>
+                <a:cs typeface="Arial"/>
+              </a:rPr>
+              <a:t xml:space="preserve"/>
+            </a:r>
+            <a:endParaRPr lang="en-US" sz="1200"/>
+          </a:p>
+          <a:p>
+            <a:pPr marL="0" indent="0">
+              <a:lnSpc>
+                <a:spcPts val="1560"/>
+              </a:lnSpc>
+              <a:spcAft>
+                <a:spcPts val="0"/>
+              </a:spcAft>
+              <a:buNone/>
+            </a:pPr>
+            <a:r>
+              <a:rPr lang="en-US" sz="1200" b="0">
+                <a:solidFill>
+                  <a:srgbClr val="202b33"/>
+                </a:solidFill>
+                <a:latin typeface="Arial"/>
+                <a:ea typeface="Arial"/>
+                <a:cs typeface="Arial"/>
+              </a:rPr>
+              <a:t xml:space="preserve">So here is the hazard, and it applies to the small systems too. Risk does not grow with the number of tools. It grows with the number of pathways between them, and every integration multiplies those. Ten tools is forty-five pairs before you count chains. Plug in one SaaS with a dozen endpoints and you did not add twelve capabilities; you added hundreds of routes from something the agent can read to something it can do. Nobody reviews those combinations. Not your security team, not the model, not you at three in the morning. The dangerous pairing is never on the roadmap. It gets discovered.</a:t>
+            </a:r>
+            <a:endParaRPr lang="en-US" sz="1200"/>
+          </a:p>
+          <a:p>
+            <a:pPr marL="0" indent="0">
+              <a:lnSpc>
+                <a:spcPts val="1560"/>
+              </a:lnSpc>
+              <a:spcAft>
+                <a:spcPts val="0"/>
+              </a:spcAft>
+              <a:buNone/>
+            </a:pPr>
+            <a:r>
+              <a:rPr lang="en-US" sz="1200" b="0">
+                <a:solidFill>
+                  <a:srgbClr val="202b33"/>
+                </a:solidFill>
+                <a:latin typeface="Arial"/>
+                <a:ea typeface="Arial"/>
+                <a:cs typeface="Arial"/>
+              </a:rPr>
+              <a:t xml:space="preserve"/>
+            </a:r>
+            <a:endParaRPr lang="en-US" sz="1200"/>
+          </a:p>
+          <a:p>
+            <a:pPr marL="0" indent="0">
+              <a:lnSpc>
+                <a:spcPts val="1560"/>
+              </a:lnSpc>
+              <a:spcAft>
+                <a:spcPts val="0"/>
+              </a:spcAft>
+              <a:buNone/>
+            </a:pPr>
+            <a:r>
+              <a:rPr lang="en-US" sz="1200" b="0">
+                <a:solidFill>
+                  <a:srgbClr val="202b33"/>
+                </a:solidFill>
+                <a:latin typeface="Arial"/>
+                <a:ea typeface="Arial"/>
+                <a:cs typeface="Arial"/>
+              </a:rPr>
+              <a:t xml:space="preserve">Most of the damage will be accidents: a confident mapping, a helpful cleanup, a tool called with the wrong ID. Then there are the people who mean it. That renamed field could carry a sentence aimed at the model, and a vendor payload is untrusted input that now gets read by something that can act.</a:t>
+            </a:r>
+            <a:endParaRPr lang="en-US" sz="1200"/>
+          </a:p>
+          <a:p>
+            <a:pPr marL="0" indent="0">
+              <a:lnSpc>
+                <a:spcPts val="1560"/>
+              </a:lnSpc>
+              <a:spcAft>
+                <a:spcPts val="0"/>
+              </a:spcAft>
+              <a:buNone/>
+            </a:pPr>
+            <a:r>
+              <a:rPr lang="en-US" sz="1200" b="0">
+                <a:solidFill>
+                  <a:srgbClr val="202b33"/>
+                </a:solidFill>
+                <a:latin typeface="Arial"/>
+                <a:ea typeface="Arial"/>
+                <a:cs typeface="Arial"/>
+              </a:rPr>
+              <a:t xml:space="preserve"/>
+            </a:r>
+            <a:endParaRPr lang="en-US" sz="1200"/>
+          </a:p>
+          <a:p>
+            <a:pPr marL="0" indent="0">
+              <a:lnSpc>
+                <a:spcPts val="1560"/>
+              </a:lnSpc>
+              <a:spcAft>
+                <a:spcPts val="0"/>
+              </a:spcAft>
+              <a:buNone/>
+            </a:pPr>
+            <a:r>
+              <a:rPr lang="en-US" sz="1200" b="0">
+                <a:solidFill>
+                  <a:srgbClr val="202b33"/>
+                </a:solidFill>
+                <a:latin typeface="Arial"/>
+                <a:ea typeface="Arial"/>
+                <a:cs typeface="Arial"/>
+              </a:rPr>
+              <a:t xml:space="preserve">So the question is not whether to give the assistant access. It is how to keep the number of live pathways small enough to reason about, one job at a time. That is what the rest of this talk builds. The big assistant still exists. It just never has all of its hands full at once: it conjures a small agent per job, with exactly enough.</a:t>
+            </a:r>
+            <a:endParaRPr lang="en-US" sz="1200"/>
+          </a:p>
+          <a:p>
+            <a:pPr marL="0" indent="0">
+              <a:lnSpc>
+                <a:spcPts val="1560"/>
+              </a:lnSpc>
+              <a:spcAft>
+                <a:spcPts val="0"/>
+              </a:spcAft>
+              <a:buNone/>
+            </a:pPr>
+            <a:r>
+              <a:rPr lang="en-US" sz="1200" b="0">
+                <a:solidFill>
+                  <a:srgbClr val="202b33"/>
+                </a:solidFill>
+                <a:latin typeface="Arial"/>
+                <a:ea typeface="Arial"/>
+                <a:cs typeface="Arial"/>
+              </a:rPr>
+              <a:t xml:space="preserve"/>
+            </a:r>
+            <a:endParaRPr lang="en-US" sz="1200"/>
+          </a:p>
+          <a:p>
+            <a:pPr marL="0" indent="0">
+              <a:lnSpc>
+                <a:spcPts val="1560"/>
+              </a:lnSpc>
+              <a:spcAft>
+                <a:spcPts val="0"/>
+              </a:spcAft>
+              <a:buNone/>
+            </a:pPr>
+            <a:r>
+              <a:rPr lang="en-US" sz="1200" b="0">
+                <a:solidFill>
+                  <a:srgbClr val="202b33"/>
+                </a:solidFill>
+                <a:latin typeface="Arial"/>
+                <a:ea typeface="Arial"/>
+                <a:cs typeface="Arial"/>
+              </a:rPr>
+              <a:t xml:space="preserve">Your own near miss with an over-permissioned agent, or the tool pairing you only noticed after it fired.</a:t>
+            </a:r>
+            <a:endParaRPr lang="en-US" sz="1200"/>
+          </a:p>
+          <a:p>
+            <a:pPr marL="0" indent="0">
+              <a:lnSpc>
+                <a:spcPts val="1560"/>
+              </a:lnSpc>
+              <a:spcAft>
+                <a:spcPts val="0"/>
+              </a:spcAft>
+              <a:buNone/>
+            </a:pPr>
+            <a:r>
+              <a:rPr lang="en-US" sz="1200" b="0">
+                <a:solidFill>
+                  <a:srgbClr val="202b33"/>
+                </a:solidFill>
+                <a:latin typeface="Arial"/>
+                <a:ea typeface="Arial"/>
+                <a:cs typeface="Arial"/>
+              </a:rPr>
+              <a:t xml:space="preserve"/>
+            </a:r>
+            <a:endParaRPr lang="en-US" sz="1200"/>
+          </a:p>
+          <a:p>
+            <a:pPr marL="0" indent="0">
+              <a:lnSpc>
+                <a:spcPts val="1560"/>
+              </a:lnSpc>
+              <a:spcAft>
+                <a:spcPts val="0"/>
+              </a:spcAft>
+              <a:buNone/>
+            </a:pPr>
+            <a:r>
+              <a:rPr lang="en-US" sz="1200" b="0">
+                <a:solidFill>
+                  <a:srgbClr val="202b33"/>
+                </a:solidFill>
+                <a:latin typeface="Arial"/>
+                <a:ea typeface="Arial"/>
+                <a:cs typeface="Arial"/>
+              </a:rPr>
+              <a:t xml:space="preserve">Write 10 → 45 on the board. Ask who could list every read-to-write pathway in the agent they run today. Pause on the third line; let the room feel that the accident case is the common one.</a:t>
             </a:r>
             <a:endParaRPr lang="en-US" sz="1200"/>
           </a:p>
@@ -10041,7 +10087,30 @@
                 <a:ea typeface="Arial"/>
                 <a:cs typeface="Arial"/>
               </a:rPr>
-              <a:t xml:space="preserve">Now imagine the assistant that has everything</a:t>
+              <a:t xml:space="preserve">The assistant with everything is coming, one</a:t>
+            </a:r>
+            <a:endParaRPr lang="en-US" sz="3900"/>
+          </a:p>
+          <a:p>
+            <a:pPr marL="0" indent="0">
+              <a:lnSpc>
+                <a:spcPts val="4680"/>
+              </a:lnSpc>
+              <a:spcAft>
+                <a:spcPts val="0"/>
+              </a:spcAft>
+              <a:buNone/>
+            </a:pPr>
+            <a:r>
+              <a:rPr lang="en-US" sz="3900" b="1">
+                <a:solidFill>
+                  <a:srgbClr val="F5F1E9"/>
+                </a:solidFill>
+                <a:latin typeface="Arial"/>
+                <a:ea typeface="Arial"/>
+                <a:cs typeface="Arial"/>
+              </a:rPr>
+              <a:t xml:space="preserve">integration at a time</a:t>
             </a:r>
             <a:endParaRPr lang="en-US" sz="3900"/>
           </a:p>
@@ -10071,7 +10140,7 @@
       </p:sp>
       <p:pic>
         <p:nvPicPr>
-          <p:cNvPr id="5" name="f205bb45584f3452c187099cc77d62202d1ca938a5d7dfba32f6435461e10a23" descr="One agent holding every customer record and every dangerous tool is a breach waiting for a typo."/>
+          <p:cNvPr id="5" name="c6f0fbb68e5ce78026448103d918b67135212db9e9f49deb90f1f192122fe3b4" descr="Every integration multiplies the pathways from something the agent can read to something it can do; nobody reviews the combinations."/>
           <p:cNvPicPr>
             <a:picLocks noChangeAspect="1"/>
           </p:cNvPicPr>

--- a/artifacts/speaking-portfolio-expanded/decks/adaptive-systems-30min-screen.pptx
+++ b/artifacts/speaking-portfolio-expanded/decks/adaptive-systems-30min-screen.pptx
@@ -1435,7 +1435,7 @@
                 <a:ea typeface="Arial"/>
                 <a:cs typeface="Arial"/>
               </a:rPr>
-              <a:t xml:space="preserve">Start in shadow mode: the conjured agents propose artifacts and apply none. Then permit one reversible change class. Widen authority per class, from evidence about that class. This is the same discipline for tools and for compute.</a:t>
+              <a:t xml:space="preserve">Start in shadow mode: the conjured agents propose artifacts and apply none. Then permit one reversible change class. Widen authority per class, from evidence about that class. This is the same discipline for tools and for compute. It is also the loop that lets the system adjust its own fan-out and token burn from measured acceptance: acceptance up and false repairs flat, that job class gets more parallel attempts and a bigger budget; false repairs up, both come down.</a:t>
             </a:r>
             <a:endParaRPr lang="en-US" sz="1200"/>
           </a:p>
@@ -3589,7 +3589,7 @@
                 <a:ea typeface="Arial"/>
                 <a:cs typeface="Arial"/>
               </a:rPr>
-              <a:t xml:space="preserve">Zoom out from the ingest job. The assistant with every customer's data and a toolbox that can send email, issue refunds, delete records and ship code is not a design we get to decline. It is arriving one integration at a time, and not only in our products. Browsers now ship a chat that drives the page. WebMCP lets an agent act on whatever site you have open. The next generation of CLIs will take natural language by default, and you will pass `--no-agent` to get the old behavior back. The intermediary intelligence layer is going to wrap everything, and I know who to blame: the kids. Actually, the kids hate AI. It will be their kids who demand an agent safety blanket on everything. I will be in a rocking chair explaining that the internet was better on vinyl.</a:t>
+              <a:t xml:space="preserve">Zoom out from the ingest job. The assistant with every customer's data and a toolbox that can send email, issue refunds, delete records and ship code is not a design we get to decline. It is arriving one integration at a time, and not only in our products. Browsers now ship a chat that drives the page. WebMCP lets an agent act on any site that opts in, and the list of sites that opt in only goes one direction. The next generation of CLIs will take natural language by default, and you will pass `--no-agent` to get the old behavior back. The intermediary intelligence layer is going to wrap everything, and I know who to blame: the kids. Actually, the kids hate AI. It will be their kids who demand an agent safety blanket on everything. I will be in a rocking chair explaining that the internet was better on vinyl.</a:t>
             </a:r>
             <a:endParaRPr lang="en-US" sz="1200"/>
           </a:p>
@@ -4643,7 +4643,7 @@
                 <a:ea typeface="Arial"/>
                 <a:cs typeface="Arial"/>
               </a:rPr>
-              <a:t xml:space="preserve">Read customer data and post to a vendor never share one agent</a:t>
+              <a:t xml:space="preserve">Reads customer data? Then it never posts to a vendor.</a:t>
             </a:r>
             <a:endParaRPr lang="en-US" sz="1200"/>
           </a:p>
@@ -7498,7 +7498,7 @@
                 <a:ea typeface="Arial"/>
                 <a:cs typeface="Arial"/>
               </a:rPr>
-              <a:t xml:space="preserve">Scale becomes something the app asks for</a:t>
+              <a:t xml:space="preserve">Compute Is a Tool Too</a:t>
             </a:r>
             <a:endParaRPr lang="en-US" sz="3900"/>
           </a:p>
@@ -7782,7 +7782,7 @@
                 <a:ea typeface="Arial"/>
                 <a:cs typeface="Arial"/>
               </a:rPr>
-              <a:t xml:space="preserve">Widen authority only from measured outcomes</a:t>
+              <a:t xml:space="preserve">Widen Per Class, Never Per Streak</a:t>
             </a:r>
             <a:endParaRPr lang="en-US" sz="3900"/>
           </a:p>
@@ -9541,7 +9541,7 @@
                 <a:ea typeface="Arial"/>
                 <a:cs typeface="Arial"/>
               </a:rPr>
-              <a:t xml:space="preserve">The bar is: diff the schema and page a human</a:t>
+              <a:t xml:space="preserve">The Bar Is a Pager</a:t>
             </a:r>
             <a:endParaRPr lang="en-US" sz="3900"/>
           </a:p>
@@ -10087,30 +10087,7 @@
                 <a:ea typeface="Arial"/>
                 <a:cs typeface="Arial"/>
               </a:rPr>
-              <a:t xml:space="preserve">The assistant with everything is coming, one</a:t>
-            </a:r>
-            <a:endParaRPr lang="en-US" sz="3900"/>
-          </a:p>
-          <a:p>
-            <a:pPr marL="0" indent="0">
-              <a:lnSpc>
-                <a:spcPts val="4680"/>
-              </a:lnSpc>
-              <a:spcAft>
-                <a:spcPts val="0"/>
-              </a:spcAft>
-              <a:buNone/>
-            </a:pPr>
-            <a:r>
-              <a:rPr lang="en-US" sz="3900" b="1">
-                <a:solidFill>
-                  <a:srgbClr val="F5F1E9"/>
-                </a:solidFill>
-                <a:latin typeface="Arial"/>
-                <a:ea typeface="Arial"/>
-                <a:cs typeface="Arial"/>
-              </a:rPr>
-              <a:t xml:space="preserve">integration at a time</a:t>
+              <a:t xml:space="preserve">Sorry, You're Building It</a:t>
             </a:r>
             <a:endParaRPr lang="en-US" sz="3900"/>
           </a:p>

--- a/artifacts/speaking-portfolio-expanded/decks/adaptive-systems-30min-screen.pptx
+++ b/artifacts/speaking-portfolio-expanded/decks/adaptive-systems-30min-screen.pptx
@@ -151,7 +151,7 @@
                 <a:ea typeface="Arial"/>
                 <a:cs typeface="Arial"/>
               </a:rPr>
-              <a:t xml:space="preserve">Source slide 1. 00:00 to 01:30</a:t>
+              <a:t xml:space="preserve">Source slide 1. 00:00 to 02:00</a:t>
             </a:r>
             <a:endParaRPr lang="en-US" sz="1200"/>
           </a:p>
@@ -678,7 +678,7 @@
                 <a:ea typeface="Arial"/>
                 <a:cs typeface="Arial"/>
               </a:rPr>
-              <a:t xml:space="preserve">Source slide 11. 21:30 to 24:00</a:t>
+              <a:t xml:space="preserve">Source slide 11. 21:30 to 23:15</a:t>
             </a:r>
             <a:endParaRPr lang="en-US" sz="1200"/>
           </a:p>
@@ -954,52 +954,6 @@
                 <a:ea typeface="Arial"/>
                 <a:cs typeface="Arial"/>
               </a:rPr>
-              <a:t xml:space="preserve">The guard is the same one we used for tools. The agent chooses from a catalog of approved instance classes; the scheduler enforces leases and teardown; an unapproved faster region is not a candidate no matter how good the latency looks. The mechanics and the ecosystem are a companion talk.</a:t>
-            </a:r>
-            <a:endParaRPr lang="en-US" sz="1200"/>
-          </a:p>
-          <a:p>
-            <a:pPr marL="0" indent="0">
-              <a:lnSpc>
-                <a:spcPts val="1560"/>
-              </a:lnSpc>
-              <a:spcAft>
-                <a:spcPts val="0"/>
-              </a:spcAft>
-              <a:buNone/>
-            </a:pPr>
-            <a:r>
-              <a:rPr lang="en-US" sz="1200" b="0">
-                <a:solidFill>
-                  <a:srgbClr val="202b33"/>
-                </a:solidFill>
-                <a:latin typeface="Arial"/>
-                <a:ea typeface="Arial"/>
-                <a:cs typeface="Arial"/>
-              </a:rPr>
-              <a:t xml:space="preserve"/>
-            </a:r>
-            <a:endParaRPr lang="en-US" sz="1200"/>
-          </a:p>
-          <a:p>
-            <a:pPr marL="0" indent="0">
-              <a:lnSpc>
-                <a:spcPts val="1560"/>
-              </a:lnSpc>
-              <a:spcAft>
-                <a:spcPts val="0"/>
-              </a:spcAft>
-              <a:buNone/>
-            </a:pPr>
-            <a:r>
-              <a:rPr lang="en-US" sz="1200" b="0">
-                <a:solidFill>
-                  <a:srgbClr val="202b33"/>
-                </a:solidFill>
-                <a:latin typeface="Arial"/>
-                <a:ea typeface="Arial"/>
-                <a:cs typeface="Arial"/>
-              </a:rPr>
               <a:t xml:space="preserve">A job where per-customer compute would have changed the pricing conversation.</a:t>
             </a:r>
             <a:endParaRPr lang="en-US" sz="1200"/>
@@ -1092,7 +1046,7 @@
                 <a:ea typeface="Arial"/>
                 <a:cs typeface="Arial"/>
               </a:rPr>
-              <a:t xml:space="preserve">Bridge: whatever the app changed today, an engineer sees it in one report, and authority widens only from measured outcomes.</a:t>
+              <a:t xml:space="preserve">Bridge: the compute guard is the tool guard — an approved catalog, enforced leases, and no unapproved region no matter how good the latency looks. Whatever the app changed today, an engineer sees it in one report, and authority widens only from measured outcomes on the same recorded incidents: recoveries, but also false repairs, dropped records, cost and human corrections.</a:t>
             </a:r>
             <a:endParaRPr lang="en-US" sz="1200"/>
           </a:p>
@@ -1205,7 +1159,7 @@
                 <a:ea typeface="Arial"/>
                 <a:cs typeface="Arial"/>
               </a:rPr>
-              <a:t xml:space="preserve">Source slide 13. 24:00 to 26:00</a:t>
+              <a:t xml:space="preserve">Source slide 13. 23:15 to 25:15</a:t>
             </a:r>
             <a:endParaRPr lang="en-US" sz="1200"/>
           </a:p>
@@ -1344,52 +1298,6 @@
                 <a:cs typeface="Arial"/>
               </a:rPr>
               <a:t xml:space="preserve">Expand: from correct recoveries, false repairs, cost, interventions</a:t>
-            </a:r>
-            <a:endParaRPr lang="en-US" sz="1200"/>
-          </a:p>
-          <a:p>
-            <a:pPr marL="0" indent="0">
-              <a:lnSpc>
-                <a:spcPts val="1560"/>
-              </a:lnSpc>
-              <a:spcAft>
-                <a:spcPts val="0"/>
-              </a:spcAft>
-              <a:buNone/>
-            </a:pPr>
-            <a:r>
-              <a:rPr lang="en-US" sz="1200" b="0">
-                <a:solidFill>
-                  <a:srgbClr val="202b33"/>
-                </a:solidFill>
-                <a:latin typeface="Arial"/>
-                <a:ea typeface="Arial"/>
-                <a:cs typeface="Arial"/>
-              </a:rPr>
-              <a:t xml:space="preserve"/>
-            </a:r>
-            <a:endParaRPr lang="en-US" sz="1200"/>
-          </a:p>
-          <a:p>
-            <a:pPr marL="0" indent="0">
-              <a:lnSpc>
-                <a:spcPts val="1560"/>
-              </a:lnSpc>
-              <a:spcAft>
-                <a:spcPts val="0"/>
-              </a:spcAft>
-              <a:buNone/>
-            </a:pPr>
-            <a:r>
-              <a:rPr lang="en-US" sz="1200" b="0">
-                <a:solidFill>
-                  <a:srgbClr val="202b33"/>
-                </a:solidFill>
-                <a:latin typeface="Arial"/>
-                <a:ea typeface="Arial"/>
-                <a:cs typeface="Arial"/>
-              </a:rPr>
-              <a:t xml:space="preserve">Compare the design with the static mapping and the pager on the same recorded incidents. Count recoveries, but also false repairs, dropped records, cost, elapsed time and human corrections. Include the incidents where the right answer was to stop. A model saying ninety percent confident settles nothing.</a:t>
             </a:r>
             <a:endParaRPr lang="en-US" sz="1200"/>
           </a:p>
@@ -1778,7 +1686,7 @@
                 <a:ea typeface="Arial"/>
                 <a:cs typeface="Arial"/>
               </a:rPr>
-              <a:t xml:space="preserve">Source slide 14. 26:00 to 28:00</a:t>
+              <a:t xml:space="preserve">Source slide 14. 25:15 to 27:30</a:t>
             </a:r>
             <a:endParaRPr lang="en-US" sz="1200"/>
           </a:p>
@@ -2100,52 +2008,6 @@
                 <a:ea typeface="Arial"/>
                 <a:cs typeface="Arial"/>
               </a:rPr>
-              <a:t xml:space="preserve">The instruction is simple: before returning generated work, retrieve relevant memory and correct applicable mistakes; after an authorized execution, record the observed outcome and update the pattern counts. If you cannot check something safely, say what remains unverified. Remembered output is untrusted data and grants no new permissions. The copyable prompt and a small record format are in the handout.</a:t>
-            </a:r>
-            <a:endParaRPr lang="en-US" sz="1200"/>
-          </a:p>
-          <a:p>
-            <a:pPr marL="0" indent="0">
-              <a:lnSpc>
-                <a:spcPts val="1560"/>
-              </a:lnSpc>
-              <a:spcAft>
-                <a:spcPts val="0"/>
-              </a:spcAft>
-              <a:buNone/>
-            </a:pPr>
-            <a:r>
-              <a:rPr lang="en-US" sz="1200" b="0">
-                <a:solidFill>
-                  <a:srgbClr val="202b33"/>
-                </a:solidFill>
-                <a:latin typeface="Arial"/>
-                <a:ea typeface="Arial"/>
-                <a:cs typeface="Arial"/>
-              </a:rPr>
-              <a:t xml:space="preserve"/>
-            </a:r>
-            <a:endParaRPr lang="en-US" sz="1200"/>
-          </a:p>
-          <a:p>
-            <a:pPr marL="0" indent="0">
-              <a:lnSpc>
-                <a:spcPts val="1560"/>
-              </a:lnSpc>
-              <a:spcAft>
-                <a:spcPts val="0"/>
-              </a:spcAft>
-              <a:buNone/>
-            </a:pPr>
-            <a:r>
-              <a:rPr lang="en-US" sz="1200" b="0">
-                <a:solidFill>
-                  <a:srgbClr val="202b33"/>
-                </a:solidFill>
-                <a:latin typeface="Arial"/>
-                <a:ea typeface="Arial"/>
-                <a:cs typeface="Arial"/>
-              </a:rPr>
               <a:t xml:space="preserve"/>
             </a:r>
             <a:endParaRPr lang="en-US" sz="1200"/>
@@ -2238,7 +2100,7 @@
                 <a:ea typeface="Arial"/>
                 <a:cs typeface="Arial"/>
               </a:rPr>
-              <a:t xml:space="preserve"/>
+              <a:t xml:space="preserve">Bridge: remembered output is untrusted data and grants no new permissions; the copyable prompt and record format are in the handout.</a:t>
             </a:r>
             <a:endParaRPr lang="en-US" sz="1200"/>
           </a:p>
@@ -2351,7 +2213,7 @@
                 <a:ea typeface="Arial"/>
                 <a:cs typeface="Arial"/>
               </a:rPr>
-              <a:t xml:space="preserve">Source slide 15. 28:00 to 30:00</a:t>
+              <a:t xml:space="preserve">Source slide 15. 27:30 to 30:00</a:t>
             </a:r>
             <a:endParaRPr lang="en-US" sz="1200"/>
           </a:p>
@@ -2490,52 +2352,6 @@
                 <a:cs typeface="Arial"/>
               </a:rPr>
               <a:t xml:space="preserve">Remember the known case</a:t>
-            </a:r>
-            <a:endParaRPr lang="en-US" sz="1200"/>
-          </a:p>
-          <a:p>
-            <a:pPr marL="0" indent="0">
-              <a:lnSpc>
-                <a:spcPts val="1560"/>
-              </a:lnSpc>
-              <a:spcAft>
-                <a:spcPts val="0"/>
-              </a:spcAft>
-              <a:buNone/>
-            </a:pPr>
-            <a:r>
-              <a:rPr lang="en-US" sz="1200" b="0">
-                <a:solidFill>
-                  <a:srgbClr val="202b33"/>
-                </a:solidFill>
-                <a:latin typeface="Arial"/>
-                <a:ea typeface="Arial"/>
-                <a:cs typeface="Arial"/>
-              </a:rPr>
-              <a:t xml:space="preserve"/>
-            </a:r>
-            <a:endParaRPr lang="en-US" sz="1200"/>
-          </a:p>
-          <a:p>
-            <a:pPr marL="0" indent="0">
-              <a:lnSpc>
-                <a:spcPts val="1560"/>
-              </a:lnSpc>
-              <a:spcAft>
-                <a:spcPts val="0"/>
-              </a:spcAft>
-              <a:buNone/>
-            </a:pPr>
-            <a:r>
-              <a:rPr lang="en-US" sz="1200" b="0">
-                <a:solidFill>
-                  <a:srgbClr val="202b33"/>
-                </a:solidFill>
-                <a:latin typeface="Arial"/>
-                <a:ea typeface="Arial"/>
-                <a:cs typeface="Arial"/>
-              </a:rPr>
-              <a:t xml:space="preserve">Return to the field that changed overnight. We did not predict its spelling. We did define what had to stay true, what evidence a repair needed, which tools this one job could have, and how far the app could go without us.</a:t>
             </a:r>
             <a:endParaRPr lang="en-US" sz="1200"/>
           </a:p>
@@ -2878,7 +2694,7 @@
                 <a:ea typeface="Arial"/>
                 <a:cs typeface="Arial"/>
               </a:rPr>
-              <a:t xml:space="preserve">Source slide 2. 01:30 to 03:00</a:t>
+              <a:t xml:space="preserve">Source slide 2. 02:00 to 03:30</a:t>
             </a:r>
             <a:endParaRPr lang="en-US" sz="1200"/>
           </a:p>
@@ -3109,52 +2925,6 @@
                 <a:cs typeface="Arial"/>
               </a:rPr>
               <a:t xml:space="preserve">The agent has to beat that. Not on vibes. On time to recover, on records kept moving, and on a number the baseline gets for free: false repairs. Alert-and-wait never turns a rename into plausible wrong data. If the adaptive version does, even once, it has made operations worse.</a:t>
-            </a:r>
-            <a:endParaRPr lang="en-US" sz="1200"/>
-          </a:p>
-          <a:p>
-            <a:pPr marL="0" indent="0">
-              <a:lnSpc>
-                <a:spcPts val="1560"/>
-              </a:lnSpc>
-              <a:spcAft>
-                <a:spcPts val="0"/>
-              </a:spcAft>
-              <a:buNone/>
-            </a:pPr>
-            <a:r>
-              <a:rPr lang="en-US" sz="1200" b="0">
-                <a:solidFill>
-                  <a:srgbClr val="202b33"/>
-                </a:solidFill>
-                <a:latin typeface="Arial"/>
-                <a:ea typeface="Arial"/>
-                <a:cs typeface="Arial"/>
-              </a:rPr>
-              <a:t xml:space="preserve"/>
-            </a:r>
-            <a:endParaRPr lang="en-US" sz="1200"/>
-          </a:p>
-          <a:p>
-            <a:pPr marL="0" indent="0">
-              <a:lnSpc>
-                <a:spcPts val="1560"/>
-              </a:lnSpc>
-              <a:spcAft>
-                <a:spcPts val="0"/>
-              </a:spcAft>
-              <a:buNone/>
-            </a:pPr>
-            <a:r>
-              <a:rPr lang="en-US" sz="1200" b="0">
-                <a:solidFill>
-                  <a:srgbClr val="202b33"/>
-                </a:solidFill>
-                <a:latin typeface="Arial"/>
-                <a:ea typeface="Arial"/>
-                <a:cs typeface="Arial"/>
-              </a:rPr>
-              <a:t xml:space="preserve">So every slide from here is about buying recovery speed without buying corruption. Keep that trade in your head; it is the whole talk.</a:t>
             </a:r>
             <a:endParaRPr lang="en-US" sz="1200"/>
           </a:p>
@@ -3405,7 +3175,7 @@
                 <a:ea typeface="Arial"/>
                 <a:cs typeface="Arial"/>
               </a:rPr>
-              <a:t xml:space="preserve">Source slide 3. 03:00 to 05:30</a:t>
+              <a:t xml:space="preserve">Source slide 3. 03:30 to 07:15</a:t>
             </a:r>
             <a:endParaRPr lang="en-US" sz="1200"/>
           </a:p>
@@ -3589,7 +3359,7 @@
                 <a:ea typeface="Arial"/>
                 <a:cs typeface="Arial"/>
               </a:rPr>
-              <a:t xml:space="preserve">Zoom out from the ingest job. The assistant with every customer's data and a toolbox that can send email, issue refunds, delete records and ship code is not a design we get to decline. It is arriving one integration at a time, and not only in our products. Browsers now ship a chat that drives the page. WebMCP lets an agent act on any site that opts in, and the list of sites that opt in only goes one direction. The next generation of CLIs will take natural language by default, and you will pass `--no-agent` to get the old behavior back. The intermediary intelligence layer is going to wrap everything, and I know who to blame: the kids. Actually, the kids hate AI. It will be their kids who demand an agent safety blanket on everything. I will be in a rocking chair explaining that the internet was better on vinyl.</a:t>
+              <a:t xml:space="preserve">Zoom out from the ingest job. The assistant with every customer's data and a toolbox that can send email, issue refunds, delete records and ship code is not a design we get to decline. It is arriving one integration at a time, and not only in our products.</a:t>
             </a:r>
             <a:endParaRPr lang="en-US" sz="1200"/>
           </a:p>
@@ -3681,52 +3451,6 @@
                 <a:ea typeface="Arial"/>
                 <a:cs typeface="Arial"/>
               </a:rPr>
-              <a:t xml:space="preserve">Most of the damage will be accidents: a confident mapping, a helpful cleanup, a tool called with the wrong ID. Then there are the people who mean it. That renamed field could carry a sentence aimed at the model, and a vendor payload is untrusted input that now gets read by something that can act.</a:t>
-            </a:r>
-            <a:endParaRPr lang="en-US" sz="1200"/>
-          </a:p>
-          <a:p>
-            <a:pPr marL="0" indent="0">
-              <a:lnSpc>
-                <a:spcPts val="1560"/>
-              </a:lnSpc>
-              <a:spcAft>
-                <a:spcPts val="0"/>
-              </a:spcAft>
-              <a:buNone/>
-            </a:pPr>
-            <a:r>
-              <a:rPr lang="en-US" sz="1200" b="0">
-                <a:solidFill>
-                  <a:srgbClr val="202b33"/>
-                </a:solidFill>
-                <a:latin typeface="Arial"/>
-                <a:ea typeface="Arial"/>
-                <a:cs typeface="Arial"/>
-              </a:rPr>
-              <a:t xml:space="preserve"/>
-            </a:r>
-            <a:endParaRPr lang="en-US" sz="1200"/>
-          </a:p>
-          <a:p>
-            <a:pPr marL="0" indent="0">
-              <a:lnSpc>
-                <a:spcPts val="1560"/>
-              </a:lnSpc>
-              <a:spcAft>
-                <a:spcPts val="0"/>
-              </a:spcAft>
-              <a:buNone/>
-            </a:pPr>
-            <a:r>
-              <a:rPr lang="en-US" sz="1200" b="0">
-                <a:solidFill>
-                  <a:srgbClr val="202b33"/>
-                </a:solidFill>
-                <a:latin typeface="Arial"/>
-                <a:ea typeface="Arial"/>
-                <a:cs typeface="Arial"/>
-              </a:rPr>
               <a:t xml:space="preserve">So the question is not whether to give the assistant access. It is how to keep the number of live pathways small enough to reason about, one job at a time. That is what the rest of this talk builds. The big assistant still exists. It just never has all of its hands full at once: it conjures a small agent per job, with exactly enough.</a:t>
             </a:r>
             <a:endParaRPr lang="en-US" sz="1200"/>
@@ -3865,7 +3589,7 @@
                 <a:ea typeface="Arial"/>
                 <a:cs typeface="Arial"/>
               </a:rPr>
-              <a:t xml:space="preserve"/>
+              <a:t xml:space="preserve">Bridge: most of the damage will be accidents — a confident mapping, a helpful cleanup, a tool called with the wrong ID — and a renamed field is untrusted input read by something that can act.</a:t>
             </a:r>
             <a:endParaRPr lang="en-US" sz="1200"/>
           </a:p>
@@ -3978,7 +3702,7 @@
                 <a:ea typeface="Arial"/>
                 <a:cs typeface="Arial"/>
               </a:rPr>
-              <a:t xml:space="preserve">Source slide 4. 05:30 to 09:00</a:t>
+              <a:t xml:space="preserve">Source slide 4. 07:15 to 10:45</a:t>
             </a:r>
             <a:endParaRPr lang="en-US" sz="1200"/>
           </a:p>
@@ -4551,7 +4275,7 @@
                 <a:ea typeface="Arial"/>
                 <a:cs typeface="Arial"/>
               </a:rPr>
-              <a:t xml:space="preserve">Source slide 5. 09:00 to 11:30</a:t>
+              <a:t xml:space="preserve">Source slide 5. 10:45 to 13:15</a:t>
             </a:r>
             <a:endParaRPr lang="en-US" sz="1200"/>
           </a:p>
@@ -4873,52 +4597,6 @@
                 <a:ea typeface="Arial"/>
                 <a:cs typeface="Arial"/>
               </a:rPr>
-              <a:t xml:space="preserve">For sensitive processing, the planner gets an opaque job reference. A trusted dispatcher grants a local worker scoped access; the worker touches the data; only an allowlisted status comes back. A signed download URL is a bearer credential. Handing it to a model while asking the model not to use it is not isolation, it is hope.</a:t>
-            </a:r>
-            <a:endParaRPr lang="en-US" sz="1200"/>
-          </a:p>
-          <a:p>
-            <a:pPr marL="0" indent="0">
-              <a:lnSpc>
-                <a:spcPts val="1560"/>
-              </a:lnSpc>
-              <a:spcAft>
-                <a:spcPts val="0"/>
-              </a:spcAft>
-              <a:buNone/>
-            </a:pPr>
-            <a:r>
-              <a:rPr lang="en-US" sz="1200" b="0">
-                <a:solidFill>
-                  <a:srgbClr val="202b33"/>
-                </a:solidFill>
-                <a:latin typeface="Arial"/>
-                <a:ea typeface="Arial"/>
-                <a:cs typeface="Arial"/>
-              </a:rPr>
-              <a:t xml:space="preserve"/>
-            </a:r>
-            <a:endParaRPr lang="en-US" sz="1200"/>
-          </a:p>
-          <a:p>
-            <a:pPr marL="0" indent="0">
-              <a:lnSpc>
-                <a:spcPts val="1560"/>
-              </a:lnSpc>
-              <a:spcAft>
-                <a:spcPts val="0"/>
-              </a:spcAft>
-              <a:buNone/>
-            </a:pPr>
-            <a:r>
-              <a:rPr lang="en-US" sz="1200" b="0">
-                <a:solidFill>
-                  <a:srgbClr val="202b33"/>
-                </a:solidFill>
-                <a:latin typeface="Arial"/>
-                <a:ea typeface="Arial"/>
-                <a:cs typeface="Arial"/>
-              </a:rPr>
               <a:t xml:space="preserve">Saltzer and Schroeder (1975), [The Protection of Information in Computer Systems](https://doi.org/10.1109/PROC.1975.9939), Proceedings of the IEEE 63(9), 1278 to 1308. Least privilege is their principle (f).</a:t>
             </a:r>
             <a:endParaRPr lang="en-US" sz="1200"/>
@@ -5057,7 +4735,7 @@
                 <a:ea typeface="Arial"/>
                 <a:cs typeface="Arial"/>
               </a:rPr>
-              <a:t xml:space="preserve"/>
+              <a:t xml:space="preserve">Bridge: a signed download URL is a bearer credential; handing it to a model while asking the model not to use it is hope, not isolation.</a:t>
             </a:r>
             <a:endParaRPr lang="en-US" sz="1200"/>
           </a:p>
@@ -5170,7 +4848,7 @@
                 <a:ea typeface="Arial"/>
                 <a:cs typeface="Arial"/>
               </a:rPr>
-              <a:t xml:space="preserve">Source slide 6. 11:30 to 14:00</a:t>
+              <a:t xml:space="preserve">Source slide 6. 13:15 to 15:00</a:t>
             </a:r>
             <a:endParaRPr lang="en-US" sz="1200"/>
           </a:p>
@@ -5651,7 +5329,7 @@
                 <a:ea typeface="Arial"/>
                 <a:cs typeface="Arial"/>
               </a:rPr>
-              <a:t xml:space="preserve">Source slide 7. 14:00 to 15:30</a:t>
+              <a:t xml:space="preserve">Source slide 7. 15:00 to 16:15</a:t>
             </a:r>
             <a:endParaRPr lang="en-US" sz="1200"/>
           </a:p>
@@ -6132,7 +5810,7 @@
                 <a:ea typeface="Arial"/>
                 <a:cs typeface="Arial"/>
               </a:rPr>
-              <a:t xml:space="preserve">Source slide 9. 15:30 to 17:00</a:t>
+              <a:t xml:space="preserve">Source slide 9. 16:15 to 17:30</a:t>
             </a:r>
             <a:endParaRPr lang="en-US" sz="1200"/>
           </a:p>
@@ -6567,7 +6245,7 @@
                 <a:ea typeface="Arial"/>
                 <a:cs typeface="Arial"/>
               </a:rPr>
-              <a:t xml:space="preserve">Source slide 10. 17:00 to 21:30</a:t>
+              <a:t xml:space="preserve">Source slide 10. 17:30 to 21:30</a:t>
             </a:r>
             <a:endParaRPr lang="en-US" sz="1200"/>
           </a:p>

--- a/artifacts/speaking-portfolio-expanded/decks/adaptive-systems-30min-screen.pptx
+++ b/artifacts/speaking-portfolio-expanded/decks/adaptive-systems-30min-screen.pptx
@@ -862,53 +862,53 @@
                 <a:ea typeface="Arial"/>
                 <a:cs typeface="Arial"/>
               </a:rPr>
-              <a:t xml:space="preserve">One more thing the orchestrator can conjure: compute. Today scaling is an infra decision made once for everyone. Replica counts, instance classes, an autoscaler watching CPU. The agent inverts that. It knows this batch is mostly waiting on a provider, that eight sandboxes for six minutes would clear the backlog, and what this customer's plan allows.</a:t>
-            </a:r>
-            <a:endParaRPr lang="en-US" sz="1200"/>
-          </a:p>
-          <a:p>
-            <a:pPr marL="0" indent="0">
-              <a:lnSpc>
-                <a:spcPts val="1560"/>
-              </a:lnSpc>
-              <a:spcAft>
-                <a:spcPts val="0"/>
-              </a:spcAft>
-              <a:buNone/>
-            </a:pPr>
-            <a:r>
-              <a:rPr lang="en-US" sz="1200" b="0">
-                <a:solidFill>
-                  <a:srgbClr val="202b33"/>
-                </a:solidFill>
-                <a:latin typeface="Arial"/>
-                <a:ea typeface="Arial"/>
-                <a:cs typeface="Arial"/>
-              </a:rPr>
-              <a:t xml:space="preserve"/>
-            </a:r>
-            <a:endParaRPr lang="en-US" sz="1200"/>
-          </a:p>
-          <a:p>
-            <a:pPr marL="0" indent="0">
-              <a:lnSpc>
-                <a:spcPts val="1560"/>
-              </a:lnSpc>
-              <a:spcAft>
-                <a:spcPts val="0"/>
-              </a:spcAft>
-              <a:buNone/>
-            </a:pPr>
-            <a:r>
-              <a:rPr lang="en-US" sz="1200" b="0">
-                <a:solidFill>
-                  <a:srgbClr val="202b33"/>
-                </a:solidFill>
-                <a:latin typeface="Arial"/>
-                <a:ea typeface="Arial"/>
-                <a:cs typeface="Arial"/>
-              </a:rPr>
-              <a:t xml:space="preserve">So it asks. The request names shape, size, duration and a cost cap, and it is charged to this customer or this job rather than to a shared cluster. That is a new product surface: a customer can buy a faster turnaround, and a finance team can cap a single workflow instead of a whole environment.</a:t>
+              <a:t xml:space="preserve">One more thing the orchestrator can conjure: compute. Scaling is still an infra decision made once for everyone — replica counts, instance classes, an autoscaler watching CPU. The agent inverts that. It knows this batch is mostly waiting on a provider, that eight sandboxes for six minutes would clear the backlog, and what this customer's plan allows.</a:t>
+            </a:r>
+            <a:endParaRPr lang="en-US" sz="1200"/>
+          </a:p>
+          <a:p>
+            <a:pPr marL="0" indent="0">
+              <a:lnSpc>
+                <a:spcPts val="1560"/>
+              </a:lnSpc>
+              <a:spcAft>
+                <a:spcPts val="0"/>
+              </a:spcAft>
+              <a:buNone/>
+            </a:pPr>
+            <a:r>
+              <a:rPr lang="en-US" sz="1200" b="0">
+                <a:solidFill>
+                  <a:srgbClr val="202b33"/>
+                </a:solidFill>
+                <a:latin typeface="Arial"/>
+                <a:ea typeface="Arial"/>
+                <a:cs typeface="Arial"/>
+              </a:rPr>
+              <a:t xml:space="preserve"/>
+            </a:r>
+            <a:endParaRPr lang="en-US" sz="1200"/>
+          </a:p>
+          <a:p>
+            <a:pPr marL="0" indent="0">
+              <a:lnSpc>
+                <a:spcPts val="1560"/>
+              </a:lnSpc>
+              <a:spcAft>
+                <a:spcPts val="0"/>
+              </a:spcAft>
+              <a:buNone/>
+            </a:pPr>
+            <a:r>
+              <a:rPr lang="en-US" sz="1200" b="0">
+                <a:solidFill>
+                  <a:srgbClr val="202b33"/>
+                </a:solidFill>
+                <a:latin typeface="Arial"/>
+                <a:ea typeface="Arial"/>
+                <a:cs typeface="Arial"/>
+              </a:rPr>
+              <a:t xml:space="preserve">So it asks. The request names shape, size, duration and a cost cap, charged to this job rather than a shared cluster. That is a new product surface: a customer buys a faster turnaround, and finance caps one workflow instead of an environment.</a:t>
             </a:r>
             <a:endParaRPr lang="en-US" sz="1200"/>
           </a:p>
@@ -1343,7 +1343,7 @@
                 <a:ea typeface="Arial"/>
                 <a:cs typeface="Arial"/>
               </a:rPr>
-              <a:t xml:space="preserve">Start in shadow mode: the conjured agents propose artifacts and apply none. Then permit one reversible change class. Widen authority per class, from evidence about that class. This is the same discipline for tools and for compute. It is also the loop that lets the system adjust its own fan-out and token burn from measured acceptance: acceptance up and false repairs flat, that job class gets more parallel attempts and a bigger budget; false repairs up, both come down.</a:t>
+              <a:t xml:space="preserve">Start in shadow mode: the conjured agents propose artifacts and apply none. Then permit one reversible change class, and widen authority per class from evidence about that class. Same discipline for tools and for compute. It is also the loop that tunes its own fan-out: acceptance up and false repairs flat, that job class gets more parallel attempts and a bigger budget; false repairs up, both come down.</a:t>
             </a:r>
             <a:endParaRPr lang="en-US" sz="1200"/>
           </a:p>
@@ -1916,53 +1916,53 @@
                 <a:ea typeface="Arial"/>
                 <a:cs typeface="Arial"/>
               </a:rPr>
-              <a:t xml:space="preserve">You do not need the whole agent factory to start. Take one agent that writes SQL, builds reports, runs shell commands or generates scripted API actions. Give it working memory for this job: the goal, constraints, draft and unresolved checks. Give it observational memory across jobs: what it generated, what actually ran, what failed, and what the checks established. Now ask it to consult that history before it hands you the next answer.</a:t>
-            </a:r>
-            <a:endParaRPr lang="en-US" sz="1200"/>
-          </a:p>
-          <a:p>
-            <a:pPr marL="0" indent="0">
-              <a:lnSpc>
-                <a:spcPts val="1560"/>
-              </a:lnSpc>
-              <a:spcAft>
-                <a:spcPts val="0"/>
-              </a:spcAft>
-              <a:buNone/>
-            </a:pPr>
-            <a:r>
-              <a:rPr lang="en-US" sz="1200" b="0">
-                <a:solidFill>
-                  <a:srgbClr val="202b33"/>
-                </a:solidFill>
-                <a:latin typeface="Arial"/>
-                <a:ea typeface="Arial"/>
-                <a:cs typeface="Arial"/>
-              </a:rPr>
-              <a:t xml:space="preserve"/>
-            </a:r>
-            <a:endParaRPr lang="en-US" sz="1200"/>
-          </a:p>
-          <a:p>
-            <a:pPr marL="0" indent="0">
-              <a:lnSpc>
-                <a:spcPts val="1560"/>
-              </a:lnSpc>
-              <a:spcAft>
-                <a:spcPts val="0"/>
-              </a:spcAft>
-              <a:buNone/>
-            </a:pPr>
-            <a:r>
-              <a:rPr lang="en-US" sz="1200" b="0">
-                <a:solidFill>
-                  <a:srgbClr val="202b33"/>
-                </a:solidFill>
-                <a:latin typeface="Arial"/>
-                <a:ea typeface="Arial"/>
-                <a:cs typeface="Arial"/>
-              </a:rPr>
-              <a:t xml:space="preserve">Suppose a reporting query keeps forgetting the tenant filter. It runs perfectly well; it reports the wrong population. An independent preflight check rejects it before dispatch. Record the draft, the failed check, the correction and the eventual result. Next time, retrieve that pattern while the agent is still drafting. Fix the omission before returning the SQL, then run the check again. That is adaptive behavior you can build with one agent and a small log.</a:t>
+              <a:t xml:space="preserve">You do not need the whole agent factory to start. Take one agent that writes SQL or runs shell commands. Give it working memory for this job — goal, constraints, draft, unresolved checks — and observational memory across jobs: what it generated, what actually ran, what failed. Then make it consult that history before it hands you the next answer.</a:t>
+            </a:r>
+            <a:endParaRPr lang="en-US" sz="1200"/>
+          </a:p>
+          <a:p>
+            <a:pPr marL="0" indent="0">
+              <a:lnSpc>
+                <a:spcPts val="1560"/>
+              </a:lnSpc>
+              <a:spcAft>
+                <a:spcPts val="0"/>
+              </a:spcAft>
+              <a:buNone/>
+            </a:pPr>
+            <a:r>
+              <a:rPr lang="en-US" sz="1200" b="0">
+                <a:solidFill>
+                  <a:srgbClr val="202b33"/>
+                </a:solidFill>
+                <a:latin typeface="Arial"/>
+                <a:ea typeface="Arial"/>
+                <a:cs typeface="Arial"/>
+              </a:rPr>
+              <a:t xml:space="preserve"/>
+            </a:r>
+            <a:endParaRPr lang="en-US" sz="1200"/>
+          </a:p>
+          <a:p>
+            <a:pPr marL="0" indent="0">
+              <a:lnSpc>
+                <a:spcPts val="1560"/>
+              </a:lnSpc>
+              <a:spcAft>
+                <a:spcPts val="0"/>
+              </a:spcAft>
+              <a:buNone/>
+            </a:pPr>
+            <a:r>
+              <a:rPr lang="en-US" sz="1200" b="0">
+                <a:solidFill>
+                  <a:srgbClr val="202b33"/>
+                </a:solidFill>
+                <a:latin typeface="Arial"/>
+                <a:ea typeface="Arial"/>
+                <a:cs typeface="Arial"/>
+              </a:rPr>
+              <a:t xml:space="preserve">Suppose a reporting query keeps forgetting the tenant filter. It runs perfectly well and reports the wrong population. A preflight check the agent did not write rejects it before dispatch. Record the draft, the failed check, the correction. Next time, retrieve that pattern while the agent is still drafting, fix the omission before returning the SQL, and run the check again. That is adaptive behavior built from one agent and a small log.</a:t>
             </a:r>
             <a:endParaRPr lang="en-US" sz="1200"/>
           </a:p>
@@ -2397,7 +2397,7 @@
                 <a:ea typeface="Arial"/>
                 <a:cs typeface="Arial"/>
               </a:rPr>
-              <a:t xml:space="preserve">And return to the assistant with everything. It is still coming; nothing on these slides stops it, and I would not want to. What changed is how many of its pathways are live at once. Each job gets a small agent with a tailored prompt, a short tool list, a hard budget, and a log of every time it asked for more. That is the strategy I believe in for the next few years: not one agent holding every combination, which nobody can check, but many small ones you can afford to.</a:t>
+              <a:t xml:space="preserve">And return to the assistant with everything. It is still coming; nothing on these slides stops it, and I would not want them to. What changed is how many of its pathways are live at once. Not one agent holding every combination, which nobody can check. Many small ones you can afford to.</a:t>
             </a:r>
             <a:endParaRPr lang="en-US" sz="1200"/>
           </a:p>
@@ -3405,53 +3405,53 @@
                 <a:ea typeface="Arial"/>
                 <a:cs typeface="Arial"/>
               </a:rPr>
-              <a:t xml:space="preserve">So here is the hazard, and it applies to the small systems too. Risk does not grow with the number of tools. It grows with the number of pathways between them, and every integration multiplies those. Ten tools is forty-five pairs before you count chains. Plug in one SaaS with a dozen endpoints and you did not add twelve capabilities; you added hundreds of routes from something the agent can read to something it can do. Nobody reviews those combinations. Not your security team, not the model, not you at three in the morning. The dangerous pairing is never on the roadmap. It gets discovered.</a:t>
-            </a:r>
-            <a:endParaRPr lang="en-US" sz="1200"/>
-          </a:p>
-          <a:p>
-            <a:pPr marL="0" indent="0">
-              <a:lnSpc>
-                <a:spcPts val="1560"/>
-              </a:lnSpc>
-              <a:spcAft>
-                <a:spcPts val="0"/>
-              </a:spcAft>
-              <a:buNone/>
-            </a:pPr>
-            <a:r>
-              <a:rPr lang="en-US" sz="1200" b="0">
-                <a:solidFill>
-                  <a:srgbClr val="202b33"/>
-                </a:solidFill>
-                <a:latin typeface="Arial"/>
-                <a:ea typeface="Arial"/>
-                <a:cs typeface="Arial"/>
-              </a:rPr>
-              <a:t xml:space="preserve"/>
-            </a:r>
-            <a:endParaRPr lang="en-US" sz="1200"/>
-          </a:p>
-          <a:p>
-            <a:pPr marL="0" indent="0">
-              <a:lnSpc>
-                <a:spcPts val="1560"/>
-              </a:lnSpc>
-              <a:spcAft>
-                <a:spcPts val="0"/>
-              </a:spcAft>
-              <a:buNone/>
-            </a:pPr>
-            <a:r>
-              <a:rPr lang="en-US" sz="1200" b="0">
-                <a:solidFill>
-                  <a:srgbClr val="202b33"/>
-                </a:solidFill>
-                <a:latin typeface="Arial"/>
-                <a:ea typeface="Arial"/>
-                <a:cs typeface="Arial"/>
-              </a:rPr>
-              <a:t xml:space="preserve">So the question is not whether to give the assistant access. It is how to keep the number of live pathways small enough to reason about, one job at a time. That is what the rest of this talk builds. The big assistant still exists. It just never has all of its hands full at once: it conjures a small agent per job, with exactly enough.</a:t>
+              <a:t xml:space="preserve">Here is the hazard, and it applies to the small systems too. Risk does not grow with the number of tools. It grows with the pathways between them, and every integration multiplies those. Ten tools is forty-five pairs before you count chains. Plug in one SaaS with a dozen endpoints and you did not add twelve capabilities; you added hundreds of routes from something the agent can read to something it can do. Nobody reviews those combinations. Not your security team, not the model, not you at three in the morning. The dangerous pairing is never on the roadmap. It gets discovered.</a:t>
+            </a:r>
+            <a:endParaRPr lang="en-US" sz="1200"/>
+          </a:p>
+          <a:p>
+            <a:pPr marL="0" indent="0">
+              <a:lnSpc>
+                <a:spcPts val="1560"/>
+              </a:lnSpc>
+              <a:spcAft>
+                <a:spcPts val="0"/>
+              </a:spcAft>
+              <a:buNone/>
+            </a:pPr>
+            <a:r>
+              <a:rPr lang="en-US" sz="1200" b="0">
+                <a:solidFill>
+                  <a:srgbClr val="202b33"/>
+                </a:solidFill>
+                <a:latin typeface="Arial"/>
+                <a:ea typeface="Arial"/>
+                <a:cs typeface="Arial"/>
+              </a:rPr>
+              <a:t xml:space="preserve"/>
+            </a:r>
+            <a:endParaRPr lang="en-US" sz="1200"/>
+          </a:p>
+          <a:p>
+            <a:pPr marL="0" indent="0">
+              <a:lnSpc>
+                <a:spcPts val="1560"/>
+              </a:lnSpc>
+              <a:spcAft>
+                <a:spcPts val="0"/>
+              </a:spcAft>
+              <a:buNone/>
+            </a:pPr>
+            <a:r>
+              <a:rPr lang="en-US" sz="1200" b="0">
+                <a:solidFill>
+                  <a:srgbClr val="202b33"/>
+                </a:solidFill>
+                <a:latin typeface="Arial"/>
+                <a:ea typeface="Arial"/>
+                <a:cs typeface="Arial"/>
+              </a:rPr>
+              <a:t xml:space="preserve">So the question is not whether to grant access. It is how many pathways are live at once. The big assistant still exists; it just never has all of its hands full at the same time, because it conjures a small agent per job with exactly enough.</a:t>
             </a:r>
             <a:endParaRPr lang="en-US" sz="1200"/>
           </a:p>
@@ -3978,53 +3978,53 @@
                 <a:ea typeface="Arial"/>
                 <a:cs typeface="Arial"/>
               </a:rPr>
-              <a:t xml:space="preserve">The orchestrator runs the result through a loop: is the job done, does it need another specialist, or must it stop? A diff agent hands to a fixture-writer agent hands to a reviewer, each with its own blast radius, each disposable when finished. Nobody rents a committee every time a CSV arrives; the known mapping runs as code, and only the unfamiliar case conjures anything.</a:t>
-            </a:r>
-            <a:endParaRPr lang="en-US" sz="1200"/>
-          </a:p>
-          <a:p>
-            <a:pPr marL="0" indent="0">
-              <a:lnSpc>
-                <a:spcPts val="1560"/>
-              </a:lnSpc>
-              <a:spcAft>
-                <a:spcPts val="0"/>
-              </a:spcAft>
-              <a:buNone/>
-            </a:pPr>
-            <a:r>
-              <a:rPr lang="en-US" sz="1200" b="0">
-                <a:solidFill>
-                  <a:srgbClr val="202b33"/>
-                </a:solidFill>
-                <a:latin typeface="Arial"/>
-                <a:ea typeface="Arial"/>
-                <a:cs typeface="Arial"/>
-              </a:rPr>
-              <a:t xml:space="preserve"/>
-            </a:r>
-            <a:endParaRPr lang="en-US" sz="1200"/>
-          </a:p>
-          <a:p>
-            <a:pPr marL="0" indent="0">
-              <a:lnSpc>
-                <a:spcPts val="1560"/>
-              </a:lnSpc>
-              <a:spcAft>
-                <a:spcPts val="0"/>
-              </a:spcAft>
-              <a:buNone/>
-            </a:pPr>
-            <a:r>
-              <a:rPr lang="en-US" sz="1200" b="0">
-                <a:solidFill>
-                  <a:srgbClr val="202b33"/>
-                </a:solidFill>
-                <a:latin typeface="Arial"/>
-                <a:ea typeface="Arial"/>
-                <a:cs typeface="Arial"/>
-              </a:rPr>
-              <a:t xml:space="preserve">I have this working as a prototype on my own integrations. I am not going to give you a success rate today, because I do not have one I trust yet. I can tell you the log of denied tool requests taught me more about my own permissions than any audit.</a:t>
+              <a:t xml:space="preserve">The orchestrator loops on the result: done, needs another specialist, or must stop. A diff agent hands to a fixture-writer hands to a reviewer, each with its own blast radius, each disposable when finished. Nobody rents a committee every time a CSV arrives — the known mapping runs as code, and only the unfamiliar case conjures anything.</a:t>
+            </a:r>
+            <a:endParaRPr lang="en-US" sz="1200"/>
+          </a:p>
+          <a:p>
+            <a:pPr marL="0" indent="0">
+              <a:lnSpc>
+                <a:spcPts val="1560"/>
+              </a:lnSpc>
+              <a:spcAft>
+                <a:spcPts val="0"/>
+              </a:spcAft>
+              <a:buNone/>
+            </a:pPr>
+            <a:r>
+              <a:rPr lang="en-US" sz="1200" b="0">
+                <a:solidFill>
+                  <a:srgbClr val="202b33"/>
+                </a:solidFill>
+                <a:latin typeface="Arial"/>
+                <a:ea typeface="Arial"/>
+                <a:cs typeface="Arial"/>
+              </a:rPr>
+              <a:t xml:space="preserve"/>
+            </a:r>
+            <a:endParaRPr lang="en-US" sz="1200"/>
+          </a:p>
+          <a:p>
+            <a:pPr marL="0" indent="0">
+              <a:lnSpc>
+                <a:spcPts val="1560"/>
+              </a:lnSpc>
+              <a:spcAft>
+                <a:spcPts val="0"/>
+              </a:spcAft>
+              <a:buNone/>
+            </a:pPr>
+            <a:r>
+              <a:rPr lang="en-US" sz="1200" b="0">
+                <a:solidFill>
+                  <a:srgbClr val="202b33"/>
+                </a:solidFill>
+                <a:latin typeface="Arial"/>
+                <a:ea typeface="Arial"/>
+                <a:cs typeface="Arial"/>
+              </a:rPr>
+              <a:t xml:space="preserve">This is a prototype on my own integrations. I am not giving you a success rate today because I do not have one I trust. I can tell you the log of denied tool requests taught me more about my own permissions than any audit.</a:t>
             </a:r>
             <a:endParaRPr lang="en-US" sz="1200"/>
           </a:p>
@@ -4505,7 +4505,7 @@
                 <a:ea typeface="Arial"/>
                 <a:cs typeface="Arial"/>
               </a:rPr>
-              <a:t xml:space="preserve">This is least privilege, and Saltzer and Schroeder wrote it down in 1975: every program runs with the least set of privileges the job needs. We have all been nodding at that for fifty years and shipping service accounts that can do anything. A per-job agent is the first thing I have built where complying is genuinely easier than not.</a:t>
+              <a:t xml:space="preserve">This is least privilege, written down by Saltzer and Schroeder in 1975. We have been nodding at it for fifty years while shipping service accounts that can do anything. A per-job agent is the first thing I have built where complying is easier than not.</a:t>
             </a:r>
             <a:endParaRPr lang="en-US" sz="1200"/>
           </a:p>
